--- a/6g-talk/pptx/6g_talk.pptx
+++ b/6g-talk/pptx/6g_talk.pptx
@@ -9739,7 +9739,7 @@
                 </a:solidFill>
                 <a:latin typeface="Arial"/>
               </a:rPr>
-              <a:t>Dr. Markkandan S</a:t>
+              <a:t>Dr. Markkandan S  ·  Associate Professor</a:t>
             </a:r>
           </a:p>
           <a:p>
@@ -9751,7 +9751,7 @@
                 </a:solidFill>
                 <a:latin typeface="Arial"/>
               </a:rPr>
-              <a:t>School of Electronics Engineering, VIT</a:t>
+              <a:t>School of Electronics Engineering, Vellore Institute of Technology, Chennai  ·  markkandan.s@vit.ac.in</a:t>
             </a:r>
           </a:p>
           <a:p>
@@ -34866,7 +34866,7 @@
                 </a:solidFill>
                 <a:latin typeface="Arial"/>
               </a:rPr>
-              <a:t>Questions — now, or anytime:</a:t>
+              <a:t>Dr. Markkandan S  ·  Associate Professor, SENSE, VIT Chennai</a:t>
             </a:r>
           </a:p>
           <a:p>
@@ -34878,7 +34878,7 @@
                 </a:solidFill>
                 <a:latin typeface="Arial"/>
               </a:rPr>
-              <a:t>ipresearch7@gmail.com</a:t>
+              <a:t>markkandan.s@vit.ac.in</a:t>
             </a:r>
           </a:p>
           <a:p>
